--- a/yocto_training_all_session_decks/session_decks/D1S3_Linux_Fundamentals_Part2.pptx
+++ b/yocto_training_all_session_decks/session_decks/D1S3_Linux_Fundamentals_Part2.pptx
@@ -2929,7 +2929,7 @@
           <a:p>
             <a:fld id="{0CEC647C-F50C-4F78-AA33-D7AA6CDA18EE}" type="datetimeFigureOut">
               <a:rPr lang="en-US" smtClean="0"/>
-              <a:t>5/28/2026</a:t>
+              <a:t>6/8/2026</a:t>
             </a:fld>
             <a:endParaRPr lang="en-US"/>
           </a:p>
@@ -3094,7 +3094,7 @@
           <a:p>
             <a:fld id="{3A83341F-E62C-483B-84B4-966F8BE46097}" type="datetimeFigureOut">
               <a:rPr lang="en-US" smtClean="0"/>
-              <a:t>5/28/2026</a:t>
+              <a:t>6/8/2026</a:t>
             </a:fld>
             <a:endParaRPr lang="en-US"/>
           </a:p>
@@ -3354,6 +3354,434 @@
     </a:lvl9pPr>
   </p:notesStyle>
 </p:notesMaster>
+</file>
+
+<file path=ppt/notesSlides/notesSlide1.xml><?xml version="1.0" encoding="utf-8"?>
+<p:notes xmlns:a="http://schemas.openxmlformats.org/drawingml/2006/main" xmlns:r="http://schemas.openxmlformats.org/officeDocument/2006/relationships" xmlns:p="http://schemas.openxmlformats.org/presentationml/2006/main">
+  <p:cSld>
+    <p:spTree>
+      <p:nvGrpSpPr>
+        <p:cNvPr id="1" name=""/>
+        <p:cNvGrpSpPr/>
+        <p:nvPr/>
+      </p:nvGrpSpPr>
+      <p:grpSpPr>
+        <a:xfrm>
+          <a:off x="0" y="0"/>
+          <a:ext cx="0" cy="0"/>
+          <a:chOff x="0" y="0"/>
+          <a:chExt cx="0" cy="0"/>
+        </a:xfrm>
+      </p:grpSpPr>
+      <p:sp>
+        <p:nvSpPr>
+          <p:cNvPr id="2" name="Slide Image Placeholder 1"/>
+          <p:cNvSpPr>
+            <a:spLocks noGrp="1" noRot="1" noChangeAspect="1"/>
+          </p:cNvSpPr>
+          <p:nvPr>
+            <p:ph type="sldImg"/>
+          </p:nvPr>
+        </p:nvSpPr>
+        <p:spPr/>
+      </p:sp>
+      <p:sp>
+        <p:nvSpPr>
+          <p:cNvPr id="3" name="Notes Placeholder 2"/>
+          <p:cNvSpPr>
+            <a:spLocks noGrp="1"/>
+          </p:cNvSpPr>
+          <p:nvPr>
+            <p:ph type="body" idx="1"/>
+          </p:nvPr>
+        </p:nvSpPr>
+        <p:spPr/>
+        <p:txBody>
+          <a:bodyPr/>
+          <a:lstStyle/>
+          <a:p>
+            <a:r>
+              <a:rPr lang="en-IN" sz="1200" kern="1200" dirty="0" err="1">
+                <a:solidFill>
+                  <a:schemeClr val="tx1"/>
+                </a:solidFill>
+                <a:effectLst/>
+                <a:latin typeface="+mn-lt"/>
+                <a:ea typeface="+mn-ea"/>
+                <a:cs typeface="+mn-cs"/>
+              </a:rPr>
+              <a:t>systemd</a:t>
+            </a:r>
+            <a:r>
+              <a:rPr lang="en-IN" sz="1200" kern="1200" dirty="0">
+                <a:solidFill>
+                  <a:schemeClr val="tx1"/>
+                </a:solidFill>
+                <a:effectLst/>
+                <a:latin typeface="+mn-lt"/>
+                <a:ea typeface="+mn-ea"/>
+                <a:cs typeface="+mn-cs"/>
+              </a:rPr>
+              <a:t> is a rethinking of </a:t>
+            </a:r>
+            <a:r>
+              <a:rPr lang="en-IN" sz="1200" kern="1200" dirty="0" err="1">
+                <a:solidFill>
+                  <a:schemeClr val="tx1"/>
+                </a:solidFill>
+                <a:effectLst/>
+                <a:latin typeface="+mn-lt"/>
+                <a:ea typeface="+mn-ea"/>
+                <a:cs typeface="+mn-cs"/>
+              </a:rPr>
+              <a:t>userspace</a:t>
+            </a:r>
+            <a:r>
+              <a:rPr lang="en-IN" sz="1200" kern="1200" dirty="0">
+                <a:solidFill>
+                  <a:schemeClr val="tx1"/>
+                </a:solidFill>
+                <a:effectLst/>
+                <a:latin typeface="+mn-lt"/>
+                <a:ea typeface="+mn-ea"/>
+                <a:cs typeface="+mn-cs"/>
+              </a:rPr>
+              <a:t> initialization and service management built on modern kernel features (</a:t>
+            </a:r>
+            <a:r>
+              <a:rPr lang="en-IN" sz="1200" kern="1200" dirty="0" err="1">
+                <a:solidFill>
+                  <a:schemeClr val="tx1"/>
+                </a:solidFill>
+                <a:effectLst/>
+                <a:latin typeface="+mn-lt"/>
+                <a:ea typeface="+mn-ea"/>
+                <a:cs typeface="+mn-cs"/>
+              </a:rPr>
+              <a:t>cgroups</a:t>
+            </a:r>
+            <a:r>
+              <a:rPr lang="en-IN" sz="1200" kern="1200" dirty="0">
+                <a:solidFill>
+                  <a:schemeClr val="tx1"/>
+                </a:solidFill>
+                <a:effectLst/>
+                <a:latin typeface="+mn-lt"/>
+                <a:ea typeface="+mn-ea"/>
+                <a:cs typeface="+mn-cs"/>
+              </a:rPr>
+              <a:t>, namespaces, sockets, capabilities). It provides parallel boot, formal dependencies, service supervision, declarative configuration, socket activation, timers, resource control, and sandboxing through a consistent unit-file model. Dependencies (Wants=, Requires=) and ordering (After=, Before=) are independent concepts; conflating them is the #1 mistake. Unit files live in three places with override semantics; use </a:t>
+            </a:r>
+            <a:r>
+              <a:rPr lang="en-IN" sz="1200" kern="1200" dirty="0" err="1">
+                <a:solidFill>
+                  <a:schemeClr val="tx1"/>
+                </a:solidFill>
+                <a:effectLst/>
+                <a:latin typeface="+mn-lt"/>
+                <a:ea typeface="+mn-ea"/>
+                <a:cs typeface="+mn-cs"/>
+              </a:rPr>
+              <a:t>systemctl</a:t>
+            </a:r>
+            <a:r>
+              <a:rPr lang="en-IN" sz="1200" kern="1200" dirty="0">
+                <a:solidFill>
+                  <a:schemeClr val="tx1"/>
+                </a:solidFill>
+                <a:effectLst/>
+                <a:latin typeface="+mn-lt"/>
+                <a:ea typeface="+mn-ea"/>
+                <a:cs typeface="+mn-cs"/>
+              </a:rPr>
+              <a:t> edit to override safely.</a:t>
+            </a:r>
+          </a:p>
+          <a:p>
+            <a:r>
+              <a:rPr lang="en-IN" sz="1200" kern="1200" dirty="0">
+                <a:solidFill>
+                  <a:schemeClr val="tx1"/>
+                </a:solidFill>
+                <a:effectLst/>
+                <a:latin typeface="+mn-lt"/>
+                <a:ea typeface="+mn-ea"/>
+                <a:cs typeface="+mn-cs"/>
+              </a:rPr>
+              <a:t>Skills compound: every Linux system you touch in 2026 and beyond will be a </a:t>
+            </a:r>
+            <a:r>
+              <a:rPr lang="en-IN" sz="1200" kern="1200" dirty="0" err="1">
+                <a:solidFill>
+                  <a:schemeClr val="tx1"/>
+                </a:solidFill>
+                <a:effectLst/>
+                <a:latin typeface="+mn-lt"/>
+                <a:ea typeface="+mn-ea"/>
+                <a:cs typeface="+mn-cs"/>
+              </a:rPr>
+              <a:t>systemd</a:t>
+            </a:r>
+            <a:r>
+              <a:rPr lang="en-IN" sz="1200" kern="1200" dirty="0">
+                <a:solidFill>
+                  <a:schemeClr val="tx1"/>
+                </a:solidFill>
+                <a:effectLst/>
+                <a:latin typeface="+mn-lt"/>
+                <a:ea typeface="+mn-ea"/>
+                <a:cs typeface="+mn-cs"/>
+              </a:rPr>
+              <a:t> system. </a:t>
+            </a:r>
+            <a:r>
+              <a:rPr lang="en-IN" sz="1200" kern="1200">
+                <a:solidFill>
+                  <a:schemeClr val="tx1"/>
+                </a:solidFill>
+                <a:effectLst/>
+                <a:latin typeface="+mn-lt"/>
+                <a:ea typeface="+mn-ea"/>
+                <a:cs typeface="+mn-cs"/>
+              </a:rPr>
+              <a:t>Fluent reading of unit files, correct writing of new ones, and audit across dependency / security / resource dimensions are foundational.</a:t>
+            </a:r>
+          </a:p>
+          <a:p>
+            <a:endParaRPr lang="en-IN" dirty="0"/>
+          </a:p>
+        </p:txBody>
+      </p:sp>
+      <p:sp>
+        <p:nvSpPr>
+          <p:cNvPr id="4" name="Slide Number Placeholder 3"/>
+          <p:cNvSpPr>
+            <a:spLocks noGrp="1"/>
+          </p:cNvSpPr>
+          <p:nvPr>
+            <p:ph type="sldNum" sz="quarter" idx="5"/>
+          </p:nvPr>
+        </p:nvSpPr>
+        <p:spPr/>
+        <p:txBody>
+          <a:bodyPr/>
+          <a:lstStyle/>
+          <a:p>
+            <a:fld id="{2EE6CBB4-399F-4023-9E47-0B63A6AB6E1E}" type="slidenum">
+              <a:rPr lang="en-US" smtClean="0"/>
+              <a:t>3</a:t>
+            </a:fld>
+            <a:endParaRPr lang="en-US"/>
+          </a:p>
+        </p:txBody>
+      </p:sp>
+    </p:spTree>
+    <p:extLst>
+      <p:ext uri="{BB962C8B-B14F-4D97-AF65-F5344CB8AC3E}">
+        <p14:creationId xmlns:p14="http://schemas.microsoft.com/office/powerpoint/2010/main" val="140023255"/>
+      </p:ext>
+    </p:extLst>
+  </p:cSld>
+  <p:clrMapOvr>
+    <a:masterClrMapping/>
+  </p:clrMapOvr>
+</p:notes>
+</file>
+
+<file path=ppt/notesSlides/notesSlide2.xml><?xml version="1.0" encoding="utf-8"?>
+<p:notes xmlns:a="http://schemas.openxmlformats.org/drawingml/2006/main" xmlns:r="http://schemas.openxmlformats.org/officeDocument/2006/relationships" xmlns:p="http://schemas.openxmlformats.org/presentationml/2006/main">
+  <p:cSld>
+    <p:spTree>
+      <p:nvGrpSpPr>
+        <p:cNvPr id="1" name=""/>
+        <p:cNvGrpSpPr/>
+        <p:nvPr/>
+      </p:nvGrpSpPr>
+      <p:grpSpPr>
+        <a:xfrm>
+          <a:off x="0" y="0"/>
+          <a:ext cx="0" cy="0"/>
+          <a:chOff x="0" y="0"/>
+          <a:chExt cx="0" cy="0"/>
+        </a:xfrm>
+      </p:grpSpPr>
+      <p:sp>
+        <p:nvSpPr>
+          <p:cNvPr id="2" name="Slide Image Placeholder 1"/>
+          <p:cNvSpPr>
+            <a:spLocks noGrp="1" noRot="1" noChangeAspect="1"/>
+          </p:cNvSpPr>
+          <p:nvPr>
+            <p:ph type="sldImg"/>
+          </p:nvPr>
+        </p:nvSpPr>
+        <p:spPr/>
+      </p:sp>
+      <p:sp>
+        <p:nvSpPr>
+          <p:cNvPr id="3" name="Notes Placeholder 2"/>
+          <p:cNvSpPr>
+            <a:spLocks noGrp="1"/>
+          </p:cNvSpPr>
+          <p:nvPr>
+            <p:ph type="body" idx="1"/>
+          </p:nvPr>
+        </p:nvSpPr>
+        <p:spPr/>
+        <p:txBody>
+          <a:bodyPr/>
+          <a:lstStyle/>
+          <a:p>
+            <a:r>
+              <a:rPr lang="en-IN" sz="1200" kern="1200" dirty="0" err="1">
+                <a:solidFill>
+                  <a:schemeClr val="tx1"/>
+                </a:solidFill>
+                <a:effectLst/>
+                <a:latin typeface="+mn-lt"/>
+                <a:ea typeface="+mn-ea"/>
+                <a:cs typeface="+mn-cs"/>
+              </a:rPr>
+              <a:t>journald</a:t>
+            </a:r>
+            <a:r>
+              <a:rPr lang="en-IN" sz="1200" kern="1200" dirty="0">
+                <a:solidFill>
+                  <a:schemeClr val="tx1"/>
+                </a:solidFill>
+                <a:effectLst/>
+                <a:latin typeface="+mn-lt"/>
+                <a:ea typeface="+mn-ea"/>
+                <a:cs typeface="+mn-cs"/>
+              </a:rPr>
+              <a:t> is a binary, indexed, structured, tamper-evident, integrated logging system that captures everything (kernel, syslog, services, applications) into one </a:t>
+            </a:r>
+            <a:r>
+              <a:rPr lang="en-IN" sz="1200" kern="1200" dirty="0" err="1">
+                <a:solidFill>
+                  <a:schemeClr val="tx1"/>
+                </a:solidFill>
+                <a:effectLst/>
+                <a:latin typeface="+mn-lt"/>
+                <a:ea typeface="+mn-ea"/>
+                <a:cs typeface="+mn-cs"/>
+              </a:rPr>
+              <a:t>queryable</a:t>
+            </a:r>
+            <a:r>
+              <a:rPr lang="en-IN" sz="1200" kern="1200" dirty="0">
+                <a:solidFill>
+                  <a:schemeClr val="tx1"/>
+                </a:solidFill>
+                <a:effectLst/>
+                <a:latin typeface="+mn-lt"/>
+                <a:ea typeface="+mn-ea"/>
+                <a:cs typeface="+mn-cs"/>
+              </a:rPr>
+              <a:t> store with trustworthy metadata. The key shifts from syslog: structured fields not prose, trustworthy provenance (underscore-prefixed fields) not sender-claimed metadata, indexed queries not grep, boot-by-boot navigation not lost-on-reboot, cryptographic sealing not unverifiable text files.</a:t>
+            </a:r>
+          </a:p>
+          <a:p>
+            <a:r>
+              <a:rPr lang="en-IN" sz="1200" kern="1200" dirty="0">
+                <a:solidFill>
+                  <a:schemeClr val="tx1"/>
+                </a:solidFill>
+                <a:effectLst/>
+                <a:latin typeface="+mn-lt"/>
+                <a:ea typeface="+mn-ea"/>
+                <a:cs typeface="+mn-cs"/>
+              </a:rPr>
+              <a:t>For your career: investigating production incidents, doing forensic analysis, building observability pipelines, debugging embedded devices in the field, demonstrating compliance — all dramatically easier with </a:t>
+            </a:r>
+            <a:r>
+              <a:rPr lang="en-IN" sz="1200" kern="1200" dirty="0" err="1">
+                <a:solidFill>
+                  <a:schemeClr val="tx1"/>
+                </a:solidFill>
+                <a:effectLst/>
+                <a:latin typeface="+mn-lt"/>
+                <a:ea typeface="+mn-ea"/>
+                <a:cs typeface="+mn-cs"/>
+              </a:rPr>
+              <a:t>journald</a:t>
+            </a:r>
+            <a:r>
+              <a:rPr lang="en-IN" sz="1200" kern="1200" dirty="0">
+                <a:solidFill>
+                  <a:schemeClr val="tx1"/>
+                </a:solidFill>
+                <a:effectLst/>
+                <a:latin typeface="+mn-lt"/>
+                <a:ea typeface="+mn-ea"/>
+                <a:cs typeface="+mn-cs"/>
+              </a:rPr>
+              <a:t> mastery. The skill compounds: once you can query </a:t>
+            </a:r>
+            <a:r>
+              <a:rPr lang="en-IN" sz="1200" kern="1200" dirty="0" err="1">
+                <a:solidFill>
+                  <a:schemeClr val="tx1"/>
+                </a:solidFill>
+                <a:effectLst/>
+                <a:latin typeface="+mn-lt"/>
+                <a:ea typeface="+mn-ea"/>
+                <a:cs typeface="+mn-cs"/>
+              </a:rPr>
+              <a:t>journald</a:t>
+            </a:r>
+            <a:r>
+              <a:rPr lang="en-IN" sz="1200" kern="1200" dirty="0">
+                <a:solidFill>
+                  <a:schemeClr val="tx1"/>
+                </a:solidFill>
+                <a:effectLst/>
+                <a:latin typeface="+mn-lt"/>
+                <a:ea typeface="+mn-ea"/>
+                <a:cs typeface="+mn-cs"/>
+              </a:rPr>
+              <a:t> fluently, every other observability tool that builds on it makes more sense.</a:t>
+            </a:r>
+          </a:p>
+          <a:p>
+            <a:endParaRPr lang="en-IN" dirty="0"/>
+          </a:p>
+        </p:txBody>
+      </p:sp>
+      <p:sp>
+        <p:nvSpPr>
+          <p:cNvPr id="4" name="Slide Number Placeholder 3"/>
+          <p:cNvSpPr>
+            <a:spLocks noGrp="1"/>
+          </p:cNvSpPr>
+          <p:nvPr>
+            <p:ph type="sldNum" sz="quarter" idx="5"/>
+          </p:nvPr>
+        </p:nvSpPr>
+        <p:spPr/>
+        <p:txBody>
+          <a:bodyPr/>
+          <a:lstStyle/>
+          <a:p>
+            <a:fld id="{2EE6CBB4-399F-4023-9E47-0B63A6AB6E1E}" type="slidenum">
+              <a:rPr lang="en-US" smtClean="0"/>
+              <a:t>4</a:t>
+            </a:fld>
+            <a:endParaRPr lang="en-US"/>
+          </a:p>
+        </p:txBody>
+      </p:sp>
+    </p:spTree>
+    <p:extLst>
+      <p:ext uri="{BB962C8B-B14F-4D97-AF65-F5344CB8AC3E}">
+        <p14:creationId xmlns:p14="http://schemas.microsoft.com/office/powerpoint/2010/main" val="2002882564"/>
+      </p:ext>
+    </p:extLst>
+  </p:cSld>
+  <p:clrMapOvr>
+    <a:masterClrMapping/>
+  </p:clrMapOvr>
+</p:notes>
 </file>
 
 <file path=ppt/slideLayouts/slideLayout1.xml><?xml version="1.0" encoding="utf-8"?>
@@ -5211,13 +5639,31 @@
           <a:lstStyle/>
           <a:p>
             <a:r>
-              <a:rPr sz="4400" b="1">
+              <a:rPr sz="4400" b="1" dirty="0">
                 <a:solidFill>
                   <a:srgbClr val="FFFFFF"/>
                 </a:solidFill>
                 <a:latin typeface="Calibri"/>
               </a:rPr>
-              <a:t>Linux Fundamentals — Part 2</a:t>
+              <a:t>Linux Fundamentals </a:t>
+            </a:r>
+            <a:r>
+              <a:rPr lang="en-IN" sz="4400" b="1" dirty="0">
+                <a:solidFill>
+                  <a:srgbClr val="FFFFFF"/>
+                </a:solidFill>
+                <a:latin typeface="Calibri"/>
+              </a:rPr>
+              <a:t>-</a:t>
+            </a:r>
+            <a:r>
+              <a:rPr sz="4400" b="1" dirty="0">
+                <a:solidFill>
+                  <a:srgbClr val="FFFFFF"/>
+                </a:solidFill>
+                <a:latin typeface="Calibri"/>
+              </a:rPr>
+              <a:t> Part 2</a:t>
             </a:r>
           </a:p>
         </p:txBody>
@@ -5316,7 +5762,7 @@
         <p:spPr>
           <a:xfrm>
             <a:off x="822960" y="1463040"/>
-            <a:ext cx="10515600" cy="5029200"/>
+            <a:ext cx="10515600" cy="1938992"/>
           </a:xfrm>
           <a:prstGeom prst="rect">
             <a:avLst/>
@@ -5359,7 +5805,25 @@
                 </a:solidFill>
                 <a:latin typeface="Calibri"/>
               </a:rPr>
-              <a:t> overview — units and targets</a:t>
+              <a:t> overview </a:t>
+            </a:r>
+            <a:r>
+              <a:rPr lang="en-IN" sz="2000" b="0" i="0" dirty="0">
+                <a:solidFill>
+                  <a:srgbClr val="333333"/>
+                </a:solidFill>
+                <a:latin typeface="Calibri"/>
+              </a:rPr>
+              <a:t>:</a:t>
+            </a:r>
+            <a:r>
+              <a:rPr sz="2000" b="0" i="0" dirty="0">
+                <a:solidFill>
+                  <a:srgbClr val="333333"/>
+                </a:solidFill>
+                <a:latin typeface="Calibri"/>
+              </a:rPr>
+              <a:t> units and targets</a:t>
             </a:r>
           </a:p>
           <a:p>
@@ -5393,7 +5857,25 @@
                 </a:solidFill>
                 <a:latin typeface="Calibri"/>
               </a:rPr>
-              <a:t> — the structured logging system</a:t>
+              <a:t> </a:t>
+            </a:r>
+            <a:r>
+              <a:rPr lang="en-IN" sz="2000" b="0" i="0" dirty="0">
+                <a:solidFill>
+                  <a:srgbClr val="333333"/>
+                </a:solidFill>
+                <a:latin typeface="Calibri"/>
+              </a:rPr>
+              <a:t>:</a:t>
+            </a:r>
+            <a:r>
+              <a:rPr sz="2000" b="0" i="0" dirty="0">
+                <a:solidFill>
+                  <a:srgbClr val="333333"/>
+                </a:solidFill>
+                <a:latin typeface="Calibri"/>
+              </a:rPr>
+              <a:t> the structured logging system</a:t>
             </a:r>
           </a:p>
           <a:p>
@@ -5409,7 +5891,25 @@
                 </a:solidFill>
                 <a:latin typeface="Calibri"/>
               </a:rPr>
-              <a:t>3.  Networking essentials — interfaces, routes, DNS</a:t>
+              <a:t>3.  Networking essentials </a:t>
+            </a:r>
+            <a:r>
+              <a:rPr lang="en-IN" sz="2000" b="0" i="0" dirty="0">
+                <a:solidFill>
+                  <a:srgbClr val="333333"/>
+                </a:solidFill>
+                <a:latin typeface="Calibri"/>
+              </a:rPr>
+              <a:t>:</a:t>
+            </a:r>
+            <a:r>
+              <a:rPr sz="2000" b="0" i="0" dirty="0">
+                <a:solidFill>
+                  <a:srgbClr val="333333"/>
+                </a:solidFill>
+                <a:latin typeface="Calibri"/>
+              </a:rPr>
+              <a:t> interfaces, routes, DNS</a:t>
             </a:r>
           </a:p>
           <a:p>
@@ -5547,7 +6047,19 @@
               <a:rPr sz="3200" b="1" dirty="0">
                 <a:latin typeface="Calibri"/>
               </a:rPr>
-              <a:t> — The Init System</a:t>
+              <a:t> </a:t>
+            </a:r>
+            <a:r>
+              <a:rPr lang="en-IN" sz="3200" b="1" dirty="0">
+                <a:latin typeface="Calibri"/>
+              </a:rPr>
+              <a:t>:</a:t>
+            </a:r>
+            <a:r>
+              <a:rPr sz="3200" b="1" dirty="0">
+                <a:latin typeface="Calibri"/>
+              </a:rPr>
+              <a:t> The Init System</a:t>
             </a:r>
           </a:p>
         </p:txBody>
@@ -5637,7 +6149,25 @@
                 </a:solidFill>
                 <a:latin typeface="Calibri"/>
               </a:rPr>
-              <a:t>.service — a long-running process</a:t>
+              <a:t>.service </a:t>
+            </a:r>
+            <a:r>
+              <a:rPr lang="en-IN" b="0" i="0" dirty="0">
+                <a:solidFill>
+                  <a:srgbClr val="333333"/>
+                </a:solidFill>
+                <a:latin typeface="Calibri"/>
+              </a:rPr>
+              <a:t>:</a:t>
+            </a:r>
+            <a:r>
+              <a:rPr b="0" i="0" dirty="0">
+                <a:solidFill>
+                  <a:srgbClr val="333333"/>
+                </a:solidFill>
+                <a:latin typeface="Calibri"/>
+              </a:rPr>
+              <a:t> a long-running process</a:t>
             </a:r>
           </a:p>
           <a:p>
@@ -5653,7 +6183,25 @@
                 </a:solidFill>
                 <a:latin typeface="Calibri"/>
               </a:rPr>
-              <a:t>.socket — listen on a socket; start service on connect</a:t>
+              <a:t>.socket </a:t>
+            </a:r>
+            <a:r>
+              <a:rPr lang="en-IN" b="0" i="0" dirty="0">
+                <a:solidFill>
+                  <a:srgbClr val="333333"/>
+                </a:solidFill>
+                <a:latin typeface="Calibri"/>
+              </a:rPr>
+              <a:t>:</a:t>
+            </a:r>
+            <a:r>
+              <a:rPr b="0" i="0" dirty="0">
+                <a:solidFill>
+                  <a:srgbClr val="333333"/>
+                </a:solidFill>
+                <a:latin typeface="Calibri"/>
+              </a:rPr>
+              <a:t> listen on a socket; start service on connect</a:t>
             </a:r>
           </a:p>
           <a:p>
@@ -5669,7 +6217,25 @@
                 </a:solidFill>
                 <a:latin typeface="Calibri"/>
               </a:rPr>
-              <a:t>.timer — replaces </a:t>
+              <a:t>.timer </a:t>
+            </a:r>
+            <a:r>
+              <a:rPr lang="en-IN" b="0" i="0" dirty="0">
+                <a:solidFill>
+                  <a:srgbClr val="333333"/>
+                </a:solidFill>
+                <a:latin typeface="Calibri"/>
+              </a:rPr>
+              <a:t>:</a:t>
+            </a:r>
+            <a:r>
+              <a:rPr b="0" i="0" dirty="0">
+                <a:solidFill>
+                  <a:srgbClr val="333333"/>
+                </a:solidFill>
+                <a:latin typeface="Calibri"/>
+              </a:rPr>
+              <a:t> replaces </a:t>
             </a:r>
             <a:r>
               <a:rPr b="0" i="0" dirty="0" err="1">
@@ -5703,7 +6269,25 @@
                 </a:solidFill>
                 <a:latin typeface="Calibri"/>
               </a:rPr>
-              <a:t>.target — group of units (like a </a:t>
+              <a:t>.target </a:t>
+            </a:r>
+            <a:r>
+              <a:rPr lang="en-IN" b="0" i="0" dirty="0">
+                <a:solidFill>
+                  <a:srgbClr val="333333"/>
+                </a:solidFill>
+                <a:latin typeface="Calibri"/>
+              </a:rPr>
+              <a:t>:</a:t>
+            </a:r>
+            <a:r>
+              <a:rPr b="0" i="0" dirty="0">
+                <a:solidFill>
+                  <a:srgbClr val="333333"/>
+                </a:solidFill>
+                <a:latin typeface="Calibri"/>
+              </a:rPr>
+              <a:t> group of units (like a </a:t>
             </a:r>
             <a:r>
               <a:rPr b="0" i="0" dirty="0" err="1">
@@ -5737,7 +6321,25 @@
                 </a:solidFill>
                 <a:latin typeface="Calibri"/>
               </a:rPr>
-              <a:t>.mount — filesystem mount</a:t>
+              <a:t>.mount </a:t>
+            </a:r>
+            <a:r>
+              <a:rPr lang="en-IN" b="0" i="0" dirty="0">
+                <a:solidFill>
+                  <a:srgbClr val="333333"/>
+                </a:solidFill>
+                <a:latin typeface="Calibri"/>
+              </a:rPr>
+              <a:t>:</a:t>
+            </a:r>
+            <a:r>
+              <a:rPr b="0" i="0" dirty="0">
+                <a:solidFill>
+                  <a:srgbClr val="333333"/>
+                </a:solidFill>
+                <a:latin typeface="Calibri"/>
+              </a:rPr>
+              <a:t> filesystem mount</a:t>
             </a:r>
           </a:p>
           <a:p>
@@ -6282,7 +6884,19 @@
               <a:rPr sz="3200" b="1" dirty="0">
                 <a:latin typeface="Calibri"/>
               </a:rPr>
-              <a:t> — Structured Logs</a:t>
+              <a:t> </a:t>
+            </a:r>
+            <a:r>
+              <a:rPr lang="en-IN" sz="3200" b="1" dirty="0">
+                <a:latin typeface="Calibri"/>
+              </a:rPr>
+              <a:t>:</a:t>
+            </a:r>
+            <a:r>
+              <a:rPr sz="3200" b="1" dirty="0">
+                <a:latin typeface="Calibri"/>
+              </a:rPr>
+              <a:t> Structured Logs</a:t>
             </a:r>
           </a:p>
         </p:txBody>
@@ -8578,7 +9192,25 @@
                 </a:solidFill>
                 <a:latin typeface="Calibri"/>
               </a:rPr>
-              <a:t>• Process hanging — where?</a:t>
+              <a:t>• Process hanging </a:t>
+            </a:r>
+            <a:r>
+              <a:rPr lang="en-IN" sz="1600" b="0" i="0" dirty="0">
+                <a:solidFill>
+                  <a:srgbClr val="333333"/>
+                </a:solidFill>
+                <a:latin typeface="Calibri"/>
+              </a:rPr>
+              <a:t>-</a:t>
+            </a:r>
+            <a:r>
+              <a:rPr sz="1600" b="0" i="0" dirty="0">
+                <a:solidFill>
+                  <a:srgbClr val="333333"/>
+                </a:solidFill>
+                <a:latin typeface="Calibri"/>
+              </a:rPr>
+              <a:t> where?</a:t>
             </a:r>
           </a:p>
           <a:p>
@@ -9033,7 +9665,7 @@
         <p:spPr>
           <a:xfrm>
             <a:off x="1417320" y="2185415"/>
-            <a:ext cx="10058400" cy="320040"/>
+            <a:ext cx="10058400" cy="292388"/>
           </a:xfrm>
           <a:prstGeom prst="rect">
             <a:avLst/>
@@ -9048,13 +9680,67 @@
           <a:p>
             <a:pPr algn="l"/>
             <a:r>
-              <a:rPr sz="1300" b="0" i="0">
-                <a:solidFill>
-                  <a:srgbClr val="333333"/>
-                </a:solidFill>
-                <a:latin typeface="Calibri"/>
-              </a:rPr>
-              <a:t>Units, targets, dependencies — learn systemctl and journalctl well</a:t>
+              <a:rPr sz="1300" b="0" i="0" dirty="0">
+                <a:solidFill>
+                  <a:srgbClr val="333333"/>
+                </a:solidFill>
+                <a:latin typeface="Calibri"/>
+              </a:rPr>
+              <a:t>Units, targets, dependencies </a:t>
+            </a:r>
+            <a:r>
+              <a:rPr lang="en-IN" sz="1300" b="0" i="0" dirty="0">
+                <a:solidFill>
+                  <a:srgbClr val="333333"/>
+                </a:solidFill>
+                <a:latin typeface="Calibri"/>
+              </a:rPr>
+              <a:t>-</a:t>
+            </a:r>
+            <a:r>
+              <a:rPr sz="1300" b="0" i="0" dirty="0">
+                <a:solidFill>
+                  <a:srgbClr val="333333"/>
+                </a:solidFill>
+                <a:latin typeface="Calibri"/>
+              </a:rPr>
+              <a:t> learn </a:t>
+            </a:r>
+            <a:r>
+              <a:rPr sz="1300" b="0" i="0" dirty="0" err="1">
+                <a:solidFill>
+                  <a:srgbClr val="333333"/>
+                </a:solidFill>
+                <a:latin typeface="Calibri"/>
+              </a:rPr>
+              <a:t>systemctl</a:t>
+            </a:r>
+            <a:r>
+              <a:rPr sz="1300" b="0" i="0" dirty="0">
+                <a:solidFill>
+                  <a:srgbClr val="333333"/>
+                </a:solidFill>
+                <a:latin typeface="Calibri"/>
+              </a:rPr>
+              <a:t> and </a:t>
+            </a:r>
+            <a:r>
+              <a:rPr sz="1300" b="0" i="0" dirty="0" err="1">
+                <a:solidFill>
+                  <a:srgbClr val="333333"/>
+                </a:solidFill>
+                <a:latin typeface="Calibri"/>
+              </a:rPr>
+              <a:t>journalctl</a:t>
+            </a:r>
+            <a:r>
+              <a:rPr sz="1300" b="0" i="0" dirty="0">
+                <a:solidFill>
+                  <a:srgbClr val="333333"/>
+                </a:solidFill>
+                <a:latin typeface="Calibri"/>
+              </a:rPr>
+              <a:t> well</a:t>
             </a:r>
           </a:p>
         </p:txBody>
@@ -9156,7 +9842,7 @@
         <p:spPr>
           <a:xfrm>
             <a:off x="1417320" y="2898648"/>
-            <a:ext cx="10058400" cy="320040"/>
+            <a:ext cx="10058400" cy="292388"/>
           </a:xfrm>
           <a:prstGeom prst="rect">
             <a:avLst/>
@@ -9171,13 +9857,31 @@
           <a:p>
             <a:pPr algn="l"/>
             <a:r>
-              <a:rPr sz="1300" b="0" i="0">
-                <a:solidFill>
-                  <a:srgbClr val="333333"/>
-                </a:solidFill>
-                <a:latin typeface="Calibri"/>
-              </a:rPr>
-              <a:t>Filter by service, time, priority, PID — much better than grepping text files</a:t>
+              <a:rPr sz="1300" b="0" i="0" dirty="0">
+                <a:solidFill>
+                  <a:srgbClr val="333333"/>
+                </a:solidFill>
+                <a:latin typeface="Calibri"/>
+              </a:rPr>
+              <a:t>Filter by service, time, priority, PID </a:t>
+            </a:r>
+            <a:r>
+              <a:rPr lang="en-IN" sz="1300" b="0" i="0" dirty="0">
+                <a:solidFill>
+                  <a:srgbClr val="333333"/>
+                </a:solidFill>
+                <a:latin typeface="Calibri"/>
+              </a:rPr>
+              <a:t>-</a:t>
+            </a:r>
+            <a:r>
+              <a:rPr sz="1300" b="0" i="0" dirty="0">
+                <a:solidFill>
+                  <a:srgbClr val="333333"/>
+                </a:solidFill>
+                <a:latin typeface="Calibri"/>
+              </a:rPr>
+              <a:t> much better than grepping text files</a:t>
             </a:r>
           </a:p>
         </p:txBody>
